--- a/test/fixtures/files/offsite.pptx
+++ b/test/fixtures/files/offsite.pptx
@@ -44,7 +44,7 @@
           </a:p>
           <a:p>
             <a:r>
-              <a:t>Sam Solo &amp; Bo Wren</a:t>
+              <a:t>Sam Solo &amp; Pat</a:t>
             </a:r>
           </a:p>
         </p:txBody>
